--- a/dist/초2/수학/수와계산/초2_수학_수와계산_05_덧셈과뺄셈의관계.pptx
+++ b/dist/초2/수학/수와계산/초2_수학_수와계산_05_덧셈과뺄셈의관계.pptx
@@ -121,13 +121,13 @@
   <p:extLst>
     <p:ext uri="{521415D9-36F7-43E2-AB2F-B90AF26B5E84}">
       <p14:sectionLst xmlns:p14="http://schemas.microsoft.com/office/powerpoint/2010/main">
-        <p14:section name="도입" id="{3e4bc431-735a-4658-d73a-be789bb304d9}">
+        <p14:section name="도입" id="{58506cbe-bce3-1e7c-19b5-3d10f1692b28}">
           <p14:sldIdLst>
             <p14:sldId id="256"/>
             <p14:sldId id="257"/>
           </p14:sldIdLst>
         </p14:section>
-        <p14:section name="개념" id="{87a731d5-5290-ec56-7ac2-5e60ecee54d0}">
+        <p14:section name="개념" id="{f92eab3d-86e3-7eae-ebb5-ff9873a11873}">
           <p14:sldIdLst>
             <p14:sldId id="258"/>
             <p14:sldId id="259"/>
@@ -136,32 +136,32 @@
             <p14:sldId id="264"/>
           </p14:sldIdLst>
         </p14:section>
-        <p14:section name="연습" id="{a922707b-e27a-780c-6a50-9ff2323db127}">
+        <p14:section name="연습" id="{9d20acf9-b9c8-ba1c-50e7-ef99320a6014}">
           <p14:sldIdLst>
             <p14:sldId id="261"/>
             <p14:sldId id="262"/>
             <p14:sldId id="265"/>
           </p14:sldIdLst>
         </p14:section>
-        <p14:section name="개념" id="{9ad4ddb2-2333-7681-8735-73e719c5108f}">
+        <p14:section name="개념" id="{22022628-fba9-a432-4d6e-6ca0038a3b9d}">
           <p14:sldIdLst/>
         </p14:section>
-        <p14:section name="연습" id="{86f1f5ae-e798-a77b-71e1-1b8236c105c3}">
+        <p14:section name="연습" id="{ea7e406b-0b13-aca4-def9-73684f2764b6}">
           <p14:sldIdLst/>
         </p14:section>
-        <p14:section name="확인" id="{9d90328b-cdcd-8945-6e6d-3642c016bf8f}">
+        <p14:section name="확인" id="{829ee03c-52a1-2ad5-505e-8967db4c49d5}">
           <p14:sldIdLst>
             <p14:sldId id="266"/>
             <p14:sldId id="267"/>
             <p14:sldId id="268"/>
           </p14:sldIdLst>
         </p14:section>
-        <p14:section name="정리" id="{eb8f9e64-73ff-619b-b3da-c910f163049f}">
+        <p14:section name="정리" id="{7cf7ca1e-640d-5e8a-8e6c-e17d1efc04ad}">
           <p14:sldIdLst>
             <p14:sldId id="269"/>
           </p14:sldIdLst>
         </p14:section>
-        <p14:section name="보충" id="{859bb286-0b4f-fd65-903d-afb39e878c92}">
+        <p14:section name="보충" id="{17dc9c60-4fe6-6b18-46c6-3a0e05c4a671}">
           <p14:sldIdLst>
             <p14:sldId id="270"/>
           </p14:sldIdLst>
